--- a/site/downloads/Knowledge-Fabric-Overview.pptx
+++ b/site/downloads/Knowledge-Fabric-Overview.pptx
@@ -1888,6 +1888,9 @@
   <p:clrMapOvr>
     <a:masterClrMapping/>
   </p:clrMapOvr>
+  <p:transition spd="slow">
+    <p:fade/>
+  </p:transition>
 </p:sld>
 </file>
 
@@ -3253,6 +3256,9 @@
   <p:clrMapOvr>
     <a:masterClrMapping/>
   </p:clrMapOvr>
+  <p:transition spd="slow">
+    <p:fade/>
+  </p:transition>
 </p:sld>
 </file>
 
@@ -4766,6 +4772,9 @@
   <p:clrMapOvr>
     <a:masterClrMapping/>
   </p:clrMapOvr>
+  <p:transition spd="slow">
+    <p:fade/>
+  </p:transition>
 </p:sld>
 </file>
 
@@ -5719,6 +5728,9 @@
   <p:clrMapOvr>
     <a:masterClrMapping/>
   </p:clrMapOvr>
+  <p:transition spd="slow">
+    <p:fade/>
+  </p:transition>
 </p:sld>
 </file>
 
@@ -6624,6 +6636,9 @@
   <p:clrMapOvr>
     <a:masterClrMapping/>
   </p:clrMapOvr>
+  <p:transition spd="slow">
+    <p:fade/>
+  </p:transition>
 </p:sld>
 </file>
 
@@ -7818,6 +7833,9 @@
   <p:clrMapOvr>
     <a:masterClrMapping/>
   </p:clrMapOvr>
+  <p:transition spd="slow">
+    <p:fade/>
+  </p:transition>
 </p:sld>
 </file>
 
@@ -9712,6 +9730,9 @@
   <p:clrMapOvr>
     <a:masterClrMapping/>
   </p:clrMapOvr>
+  <p:transition spd="slow">
+    <p:fade/>
+  </p:transition>
 </p:sld>
 </file>
 
@@ -9824,6 +9845,9 @@
   <p:clrMapOvr>
     <a:masterClrMapping/>
   </p:clrMapOvr>
+  <p:transition spd="slow">
+    <p:fade/>
+  </p:transition>
 </p:sld>
 </file>
 
@@ -11453,6 +11477,9 @@
   <p:clrMapOvr>
     <a:masterClrMapping/>
   </p:clrMapOvr>
+  <p:transition spd="slow">
+    <p:fade/>
+  </p:transition>
 </p:sld>
 </file>
 
@@ -14450,6 +14477,9 @@
   <p:clrMapOvr>
     <a:masterClrMapping/>
   </p:clrMapOvr>
+  <p:transition spd="slow">
+    <p:fade/>
+  </p:transition>
 </p:sld>
 </file>
 
@@ -15723,6 +15753,9 @@
   <p:clrMapOvr>
     <a:masterClrMapping/>
   </p:clrMapOvr>
+  <p:transition spd="slow">
+    <p:fade/>
+  </p:transition>
 </p:sld>
 </file>
 
@@ -16903,6 +16936,9 @@
   <p:clrMapOvr>
     <a:masterClrMapping/>
   </p:clrMapOvr>
+  <p:transition spd="slow">
+    <p:fade/>
+  </p:transition>
 </p:sld>
 </file>
 

--- a/site/downloads/Knowledge-Fabric-Overview.pptx
+++ b/site/downloads/Knowledge-Fabric-Overview.pptx
@@ -14750,7 +14750,7 @@
                 <a:ea typeface="Calibri" pitchFamily="34" charset="-122"/>
                 <a:cs typeface="Calibri" pitchFamily="34" charset="-120"/>
               </a:rPr>
-              <a:t>Text and scanned documents, office formats, presentations, spreadsheets, structured exports and web content. Scanned material is processed so its text becomes searchable and citable.</a:t>
+              <a:t>Word documents, plain text, spreadsheets and readable PDFs — including PDFs with tables and embedded images. Formats beyond these are scoped as their own effort, openly.</a:t>
             </a:r>
             <a:endParaRPr lang="en-US" sz="1150" dirty="0"/>
           </a:p>
@@ -15462,7 +15462,7 @@
                 <a:ea typeface="Calibri" pitchFamily="34" charset="-122"/>
                 <a:cs typeface="Calibri" pitchFamily="34" charset="-120"/>
               </a:rPr>
-              <a:t>Multilingual corpora and multilingual users, with the answer returned in the language of the question and any translated passage labelled.</a:t>
+              <a:t>English-first by design; where teams need more, the question and the answer are translated for an agreed, quality-validated language list.</a:t>
             </a:r>
             <a:endParaRPr lang="en-US" sz="1150" dirty="0"/>
           </a:p>
